--- a/10_06.pptx
+++ b/10_06.pptx
@@ -105,6 +105,11 @@
       </a:defRPr>
     </a:lvl9pPr>
   </p:defaultTextStyle>
+  <p:extLst>
+    <p:ext uri="{EFAFB233-063F-42B5-8137-9DF3F51BA10A}">
+      <p15:sldGuideLst xmlns:p15="http://schemas.microsoft.com/office/powerpoint/2012/main"/>
+    </p:ext>
+  </p:extLst>
 </p:presentation>
 </file>
 
@@ -4017,7 +4022,11 @@
               <a:buChar char="•"/>
             </a:pPr>
             <a:r>
-              <a:rPr lang="it-IT" dirty="0"/>
+              <a:rPr lang="it-IT" dirty="0">
+                <a:highlight>
+                  <a:srgbClr val="FFFF00"/>
+                </a:highlight>
+              </a:rPr>
               <a:t>POLIMORFISMO</a:t>
             </a:r>
           </a:p>
@@ -4027,7 +4036,11 @@
               <a:buChar char="•"/>
             </a:pPr>
             <a:r>
-              <a:rPr lang="it-IT" dirty="0"/>
+              <a:rPr lang="it-IT" dirty="0">
+                <a:highlight>
+                  <a:srgbClr val="FFFF00"/>
+                </a:highlight>
+              </a:rPr>
               <a:t>INCAPSULAMENTO</a:t>
             </a:r>
           </a:p>
@@ -4037,8 +4050,16 @@
               <a:buChar char="•"/>
             </a:pPr>
             <a:r>
+              <a:rPr lang="it-IT" dirty="0">
+                <a:highlight>
+                  <a:srgbClr val="FFFF00"/>
+                </a:highlight>
+              </a:rPr>
+              <a:t>EREDITARIETA</a:t>
+            </a:r>
+            <a:r>
               <a:rPr lang="it-IT" dirty="0"/>
-              <a:t>EREDITARIETA’</a:t>
+              <a:t>’</a:t>
             </a:r>
           </a:p>
         </p:txBody>
